--- a/STArt.pptx
+++ b/STArt.pptx
@@ -31,7 +31,7 @@
       <p:regular r:id="rId13"/>
     </p:embeddedFont>
     <p:embeddedFont>
-      <p:font typeface="Open Sans Bold" panose="020B0806030504020204" charset="0"/>
+      <p:font typeface="Open Sans Bold" panose="020B0604020202020204" charset="0"/>
       <p:regular r:id="rId14"/>
     </p:embeddedFont>
     <p:embeddedFont>
@@ -4693,15 +4693,15 @@
         </p:nvSpPr>
         <p:spPr>
           <a:xfrm>
-            <a:off x="1875708" y="3783921"/>
-            <a:ext cx="7413649" cy="6834435"/>
+            <a:off x="1875708" y="3783920"/>
+            <a:ext cx="9782892" cy="6200928"/>
           </a:xfrm>
           <a:prstGeom prst="rect">
             <a:avLst/>
           </a:prstGeom>
         </p:spPr>
         <p:txBody>
-          <a:bodyPr lIns="0" tIns="0" rIns="0" bIns="0" rtlCol="0" anchor="t">
+          <a:bodyPr wrap="square" lIns="0" tIns="0" rIns="0" bIns="0" rtlCol="0" anchor="t">
             <a:spAutoFit/>
           </a:bodyPr>
           <a:lstStyle/>
@@ -4798,7 +4798,7 @@
               <a:t> </a:t>
             </a:r>
             <a:r>
-              <a:rPr lang="en-US" sz="2400" dirty="0">
+              <a:rPr lang="en-US" sz="2200" dirty="0">
                 <a:solidFill>
                   <a:srgbClr val="1E293B"/>
                 </a:solidFill>
@@ -4810,7 +4810,7 @@
               <a:t>Ankit </a:t>
             </a:r>
             <a:r>
-              <a:rPr lang="en-US" sz="2400" dirty="0" err="1">
+              <a:rPr lang="en-US" sz="2200" dirty="0" err="1">
                 <a:solidFill>
                   <a:srgbClr val="1E293B"/>
                 </a:solidFill>
@@ -4822,7 +4822,7 @@
               <a:t>Aryan,Shasank</a:t>
             </a:r>
             <a:r>
-              <a:rPr lang="en-US" sz="2400" dirty="0">
+              <a:rPr lang="en-US" sz="2200" dirty="0">
                 <a:solidFill>
                   <a:srgbClr val="1E293B"/>
                 </a:solidFill>
@@ -4834,7 +4834,7 @@
               <a:t> M </a:t>
             </a:r>
             <a:r>
-              <a:rPr lang="en-US" sz="2400" dirty="0" err="1">
+              <a:rPr lang="en-US" sz="2200" dirty="0" err="1">
                 <a:solidFill>
                   <a:srgbClr val="1E293B"/>
                 </a:solidFill>
@@ -4846,7 +4846,7 @@
               <a:t>Shah,Puneet</a:t>
             </a:r>
             <a:r>
-              <a:rPr lang="en-US" sz="2400" dirty="0">
+              <a:rPr lang="en-US" sz="2200" dirty="0">
                 <a:solidFill>
                   <a:srgbClr val="1E293B"/>
                 </a:solidFill>
@@ -4855,19 +4855,7 @@
                 <a:cs typeface="Open Sans"/>
                 <a:sym typeface="Open Sans"/>
               </a:rPr>
-              <a:t> Solanki</a:t>
-            </a:r>
-            <a:r>
-              <a:rPr lang="en-US" sz="2204" dirty="0">
-                <a:solidFill>
-                  <a:srgbClr val="1E293B"/>
-                </a:solidFill>
-                <a:latin typeface="Open Sans"/>
-                <a:ea typeface="Open Sans"/>
-                <a:cs typeface="Open Sans"/>
-                <a:sym typeface="Open Sans"/>
-              </a:rPr>
-              <a:t>(MCA Mini Project)</a:t>
+              <a:t> Solanki(MCA Mini Project)</a:t>
             </a:r>
           </a:p>
           <a:p>
@@ -4887,13 +4875,54 @@
             </a:endParaRPr>
           </a:p>
           <a:p>
+            <a:r>
+              <a:rPr lang="en-IN" sz="2400" b="1"/>
+              <a:t>The MERN Stack (Modern) </a:t>
+            </a:r>
+            <a:endParaRPr lang="en-IN" sz="2400"/>
+          </a:p>
+          <a:p>
+            <a:r>
+              <a:rPr lang="en-US" sz="2200"/>
+              <a:t>Frontend: React.js, Tailwind CSS. </a:t>
+            </a:r>
+          </a:p>
+          <a:p>
+            <a:r>
+              <a:rPr lang="en-US" sz="2200"/>
+              <a:t>Backend: Node.js, Express.js. </a:t>
+            </a:r>
+          </a:p>
+          <a:p>
+            <a:r>
+              <a:rPr lang="en-IN" sz="2200"/>
+              <a:t>Database: MongoDB. </a:t>
+            </a:r>
+          </a:p>
+          <a:p>
             <a:pPr algn="l">
               <a:lnSpc>
                 <a:spcPts val="3086"/>
               </a:lnSpc>
             </a:pPr>
-            <a:r>
-              <a:rPr lang="en-US" sz="2204" b="1" dirty="0">
+            <a:endParaRPr lang="en-US" sz="2204" b="1">
+              <a:solidFill>
+                <a:srgbClr val="1E293B"/>
+              </a:solidFill>
+              <a:latin typeface="Open Sans Bold"/>
+              <a:ea typeface="Open Sans Bold"/>
+              <a:cs typeface="Open Sans Bold"/>
+              <a:sym typeface="Open Sans Bold"/>
+            </a:endParaRPr>
+          </a:p>
+          <a:p>
+            <a:pPr algn="l">
+              <a:lnSpc>
+                <a:spcPts val="3086"/>
+              </a:lnSpc>
+            </a:pPr>
+            <a:r>
+              <a:rPr lang="en-US" sz="2204" b="1">
                 <a:solidFill>
                   <a:srgbClr val="1E293B"/>
                 </a:solidFill>
@@ -4902,117 +4931,8 @@
                 <a:cs typeface="Open Sans Bold"/>
                 <a:sym typeface="Open Sans Bold"/>
               </a:rPr>
-              <a:t>Technology Stack</a:t>
-            </a:r>
-          </a:p>
-          <a:p>
-            <a:pPr marL="475982" lvl="1" indent="-237991" algn="l">
-              <a:lnSpc>
-                <a:spcPts val="3086"/>
-              </a:lnSpc>
-              <a:buFont typeface="Arial"/>
-              <a:buChar char="•"/>
-            </a:pPr>
-            <a:r>
-              <a:rPr lang="en-US" sz="2204" dirty="0">
-                <a:solidFill>
-                  <a:srgbClr val="1E293B"/>
-                </a:solidFill>
-                <a:latin typeface="Open Sans"/>
-                <a:ea typeface="Open Sans"/>
-                <a:cs typeface="Open Sans"/>
-                <a:sym typeface="Open Sans"/>
-              </a:rPr>
-              <a:t>Frontend: HTML, CSS, Bootstrap, JSP</a:t>
-            </a:r>
-          </a:p>
-          <a:p>
-            <a:pPr marL="475982" lvl="1" indent="-237991" algn="l">
-              <a:lnSpc>
-                <a:spcPts val="3086"/>
-              </a:lnSpc>
-              <a:buFont typeface="Arial"/>
-              <a:buChar char="•"/>
-            </a:pPr>
-            <a:r>
-              <a:rPr lang="en-US" sz="2204" dirty="0">
-                <a:solidFill>
-                  <a:srgbClr val="1E293B"/>
-                </a:solidFill>
-                <a:latin typeface="Open Sans"/>
-                <a:ea typeface="Open Sans"/>
-                <a:cs typeface="Open Sans"/>
-                <a:sym typeface="Open Sans"/>
-              </a:rPr>
-              <a:t>Backend: Java Servlets</a:t>
-            </a:r>
-          </a:p>
-          <a:p>
-            <a:pPr marL="475982" lvl="1" indent="-237991" algn="l">
-              <a:lnSpc>
-                <a:spcPts val="3086"/>
-              </a:lnSpc>
-              <a:buFont typeface="Arial"/>
-              <a:buChar char="•"/>
-            </a:pPr>
-            <a:r>
-              <a:rPr lang="en-US" sz="2204" dirty="0">
-                <a:solidFill>
-                  <a:srgbClr val="1E293B"/>
-                </a:solidFill>
-                <a:latin typeface="Open Sans"/>
-                <a:ea typeface="Open Sans"/>
-                <a:cs typeface="Open Sans"/>
-                <a:sym typeface="Open Sans"/>
-              </a:rPr>
-              <a:t>Database: MySQL</a:t>
-            </a:r>
-          </a:p>
-          <a:p>
-            <a:pPr marL="475982" lvl="1" indent="-237991" algn="l">
-              <a:lnSpc>
-                <a:spcPts val="3086"/>
-              </a:lnSpc>
-              <a:buFont typeface="Arial"/>
-              <a:buChar char="•"/>
-            </a:pPr>
-            <a:r>
-              <a:rPr lang="en-US" sz="2204" dirty="0">
-                <a:solidFill>
-                  <a:srgbClr val="1E293B"/>
-                </a:solidFill>
-                <a:latin typeface="Open Sans"/>
-                <a:ea typeface="Open Sans"/>
-                <a:cs typeface="Open Sans"/>
-                <a:sym typeface="Open Sans"/>
-              </a:rPr>
-              <a:t>Server: Apache Tomcat</a:t>
-            </a:r>
-          </a:p>
-          <a:p>
-            <a:pPr marL="475982" lvl="1" indent="-237991" algn="l">
-              <a:lnSpc>
-                <a:spcPts val="3086"/>
-              </a:lnSpc>
-              <a:buFont typeface="Arial"/>
-              <a:buChar char="•"/>
-            </a:pPr>
-            <a:endParaRPr lang="en-US" sz="2204" dirty="0">
-              <a:solidFill>
-                <a:srgbClr val="1E293B"/>
-              </a:solidFill>
-              <a:latin typeface="Open Sans"/>
-              <a:ea typeface="Open Sans"/>
-              <a:cs typeface="Open Sans"/>
-              <a:sym typeface="Open Sans"/>
-            </a:endParaRPr>
-          </a:p>
-          <a:p>
-            <a:pPr algn="l">
-              <a:lnSpc>
-                <a:spcPts val="3086"/>
-              </a:lnSpc>
-            </a:pPr>
+              <a:t>Target </a:t>
+            </a:r>
             <a:r>
               <a:rPr lang="en-US" sz="2204" b="1" dirty="0">
                 <a:solidFill>
@@ -5023,7 +4943,7 @@
                 <a:cs typeface="Open Sans Bold"/>
                 <a:sym typeface="Open Sans Bold"/>
               </a:rPr>
-              <a:t>Target Users</a:t>
+              <a:t>Users</a:t>
             </a:r>
           </a:p>
           <a:p>
@@ -5738,6 +5658,43 @@
           </a:p>
         </p:txBody>
       </p:sp>
+      <p:pic>
+        <p:nvPicPr>
+          <p:cNvPr id="10" name="Picture 9">
+            <a:extLst>
+              <a:ext uri="{FF2B5EF4-FFF2-40B4-BE49-F238E27FC236}">
+                <a16:creationId xmlns:a16="http://schemas.microsoft.com/office/drawing/2014/main" id="{ACCFC108-E10C-3835-370F-461846DA1001}"/>
+              </a:ext>
+            </a:extLst>
+          </p:cNvPr>
+          <p:cNvPicPr>
+            <a:picLocks noChangeAspect="1"/>
+          </p:cNvPicPr>
+          <p:nvPr/>
+        </p:nvPicPr>
+        <p:blipFill>
+          <a:blip r:embed="rId3">
+            <a:alphaModFix amt="85000"/>
+            <a:extLst>
+              <a:ext uri="{28A0092B-C50C-407E-A947-70E740481C1C}">
+                <a14:useLocalDpi xmlns:a14="http://schemas.microsoft.com/office/drawing/2010/main" val="0"/>
+              </a:ext>
+            </a:extLst>
+          </a:blip>
+          <a:stretch>
+            <a:fillRect/>
+          </a:stretch>
+        </p:blipFill>
+        <p:spPr>
+          <a:xfrm>
+            <a:off x="7086600" y="3841603"/>
+            <a:ext cx="10972800" cy="6364534"/>
+          </a:xfrm>
+          <a:prstGeom prst="rect">
+            <a:avLst/>
+          </a:prstGeom>
+        </p:spPr>
+      </p:pic>
     </p:spTree>
   </p:cSld>
   <p:clrMapOvr>
@@ -7261,6 +7218,42 @@
           </a:p>
         </p:txBody>
       </p:sp>
+      <p:pic>
+        <p:nvPicPr>
+          <p:cNvPr id="9" name="Picture 8">
+            <a:extLst>
+              <a:ext uri="{FF2B5EF4-FFF2-40B4-BE49-F238E27FC236}">
+                <a16:creationId xmlns:a16="http://schemas.microsoft.com/office/drawing/2014/main" id="{D9E72AB1-8FE1-27EE-26B4-29938BC56EAA}"/>
+              </a:ext>
+            </a:extLst>
+          </p:cNvPr>
+          <p:cNvPicPr>
+            <a:picLocks noChangeAspect="1"/>
+          </p:cNvPicPr>
+          <p:nvPr/>
+        </p:nvPicPr>
+        <p:blipFill>
+          <a:blip r:embed="rId3">
+            <a:extLst>
+              <a:ext uri="{28A0092B-C50C-407E-A947-70E740481C1C}">
+                <a14:useLocalDpi xmlns:a14="http://schemas.microsoft.com/office/drawing/2010/main" val="0"/>
+              </a:ext>
+            </a:extLst>
+          </a:blip>
+          <a:stretch>
+            <a:fillRect/>
+          </a:stretch>
+        </p:blipFill>
+        <p:spPr>
+          <a:xfrm>
+            <a:off x="7772400" y="190500"/>
+            <a:ext cx="10407608" cy="7865122"/>
+          </a:xfrm>
+          <a:prstGeom prst="rect">
+            <a:avLst/>
+          </a:prstGeom>
+        </p:spPr>
+      </p:pic>
     </p:spTree>
   </p:cSld>
   <p:clrMapOvr>
